--- a/dist/초5/수학/도형과측정/초5_수학_도형과측정_06_직사각형의넓이_학생용.pptx
+++ b/dist/초5/수학/도형과측정/초5_수학_도형과측정_06_직사각형의넓이_학생용.pptx
@@ -120,13 +120,13 @@
   <p:extLst>
     <p:ext uri="{521415D9-36F7-43E2-AB2F-B90AF26B5E84}">
       <p14:sectionLst xmlns:p14="http://schemas.microsoft.com/office/powerpoint/2010/main">
-        <p14:section name="도입" id="{8b0a386b-8dd2-c375-2140-9e383ffc19d9}">
+        <p14:section name="도입" id="{81322aef-107a-5439-9581-158089d36513}">
           <p14:sldIdLst>
             <p14:sldId id="256"/>
             <p14:sldId id="257"/>
           </p14:sldIdLst>
         </p14:section>
-        <p14:section name="개념" id="{a17a46ae-ed61-c47b-89ae-d653ed7bb6f8}">
+        <p14:section name="개념" id="{c5c8c2c5-2047-32ce-cbf1-20de2c61bbd4}">
           <p14:sldIdLst>
             <p14:sldId id="258"/>
             <p14:sldId id="259"/>
@@ -134,7 +134,7 @@
             <p14:sldId id="263"/>
           </p14:sldIdLst>
         </p14:section>
-        <p14:section name="연습" id="{4734ccf2-72a2-a7b1-96cb-fba51a3c893e}">
+        <p14:section name="연습" id="{2ee1d6f2-2242-94fd-9565-04529f7e0a6a}">
           <p14:sldIdLst>
             <p14:sldId id="261"/>
             <p14:sldId id="262"/>
@@ -142,24 +142,24 @@
             <p14:sldId id="265"/>
           </p14:sldIdLst>
         </p14:section>
-        <p14:section name="개념" id="{76b5ec56-e8f5-eec6-3d2a-cf2ca03538e0}">
+        <p14:section name="개념" id="{259a1cb0-027c-9fa4-de55-c10e5692aad1}">
           <p14:sldIdLst/>
         </p14:section>
-        <p14:section name="연습" id="{73af4c64-b529-faa8-9111-80fc49fffbb6}">
+        <p14:section name="연습" id="{90b9197b-36a5-0638-d5d7-f2c54b1e6f0c}">
           <p14:sldIdLst/>
         </p14:section>
-        <p14:section name="확인" id="{5a355f4c-6c38-71df-2962-059d9688579a}">
+        <p14:section name="확인" id="{a1d8e35e-4952-cff9-d32c-518031c5aa0e}">
           <p14:sldIdLst>
             <p14:sldId id="266"/>
             <p14:sldId id="267"/>
           </p14:sldIdLst>
         </p14:section>
-        <p14:section name="정리" id="{4500f05a-6b62-700a-704b-ed857dcb0a43}">
+        <p14:section name="정리" id="{5922623d-6576-7720-2912-38c1d12e8bb2}">
           <p14:sldIdLst>
             <p14:sldId id="268"/>
           </p14:sldIdLst>
         </p14:section>
-        <p14:section name="보충" id="{487d593a-07a2-ede8-85dd-3eba2f235b0c}">
+        <p14:section name="보충" id="{cd9d182f-4c97-6d5e-1d28-983768eec453}">
           <p14:sldIdLst>
             <p14:sldId id="269"/>
           </p14:sldIdLst>
@@ -5522,19 +5522,19 @@
           </p:nvPr>
         </p:nvGraphicFramePr>
         <p:xfrm>
-          <a:off x="3625596" y="1995932"/>
-          <a:ext cx="4937760" cy="914400"/>
+          <a:off x="1293876" y="2042414"/>
+          <a:ext cx="9601200" cy="914400"/>
         </p:xfrm>
         <a:graphic>
           <a:graphicData uri="http://schemas.openxmlformats.org/drawingml/2006/table">
             <a:tbl>
               <a:tblPr/>
               <a:tblGrid>
-                <a:gridCol w="1086307"/>
-                <a:gridCol w="1382573"/>
-                <a:gridCol w="2468880"/>
+                <a:gridCol w="1920240"/>
+                <a:gridCol w="2400300"/>
+                <a:gridCol w="5280660"/>
               </a:tblGrid>
-              <a:tr h="450596">
+              <a:tr h="512572">
                 <a:tc>
                   <a:txBody>
                     <a:bodyPr/>
@@ -5544,7 +5544,7 @@
                         <a:buNone/>
                       </a:pPr>
                       <a:r>
-                        <a:rPr lang="en-US" sz="2200" b="1" dirty="0">
+                        <a:rPr lang="en-US" sz="2600" b="1" dirty="0">
                           <a:solidFill>
                             <a:srgbClr val="1F2937"/>
                           </a:solidFill>
@@ -5554,7 +5554,7 @@
                         </a:rPr>
                         <a:t>길이</a:t>
                       </a:r>
-                      <a:endParaRPr lang="en-US" sz="2200" dirty="0">
+                      <a:endParaRPr lang="en-US" sz="2600" dirty="0">
                         <a:latin typeface="맑은 고딕" charset="0"/>
                         <a:ea typeface="맑은 고딕" charset="0"/>
                         <a:cs typeface="맑은 고딕" charset="0"/>
@@ -5612,7 +5612,7 @@
                         <a:buNone/>
                       </a:pPr>
                       <a:r>
-                        <a:rPr lang="en-US" sz="2200" b="1" dirty="0">
+                        <a:rPr lang="en-US" sz="2600" b="1" dirty="0">
                           <a:solidFill>
                             <a:srgbClr val="1F2937"/>
                           </a:solidFill>
@@ -5622,7 +5622,7 @@
                         </a:rPr>
                         <a:t>같은 길이</a:t>
                       </a:r>
-                      <a:endParaRPr lang="en-US" sz="2200" dirty="0">
+                      <a:endParaRPr lang="en-US" sz="2600" dirty="0">
                         <a:latin typeface="맑은 고딕" charset="0"/>
                         <a:ea typeface="맑은 고딕" charset="0"/>
                         <a:cs typeface="맑은 고딕" charset="0"/>
@@ -5680,7 +5680,7 @@
                         <a:buNone/>
                       </a:pPr>
                       <a:r>
-                        <a:rPr lang="en-US" sz="2200" b="1" dirty="0">
+                        <a:rPr lang="en-US" sz="2600" b="1" dirty="0">
                           <a:solidFill>
                             <a:srgbClr val="1F2937"/>
                           </a:solidFill>
@@ -5690,7 +5690,7 @@
                         </a:rPr>
                         <a:t>기억하기</a:t>
                       </a:r>
-                      <a:endParaRPr lang="en-US" sz="2200" dirty="0">
+                      <a:endParaRPr lang="en-US" sz="2600" dirty="0">
                         <a:latin typeface="맑은 고딕" charset="0"/>
                         <a:ea typeface="맑은 고딕" charset="0"/>
                         <a:cs typeface="맑은 고딕" charset="0"/>
@@ -5740,7 +5740,7 @@
                   </a:tcPr>
                 </a:tc>
               </a:tr>
-              <a:tr h="791464">
+              <a:tr h="512572">
                 <a:tc>
                   <a:txBody>
                     <a:bodyPr/>
@@ -5750,7 +5750,7 @@
                         <a:buNone/>
                       </a:pPr>
                       <a:r>
-                        <a:rPr lang="en-US" sz="2200" dirty="0">
+                        <a:rPr lang="en-US" sz="2600" dirty="0">
                           <a:solidFill>
                             <a:srgbClr val="1F2937"/>
                           </a:solidFill>
@@ -5760,7 +5760,7 @@
                         </a:rPr>
                         <a:t>1 cm</a:t>
                       </a:r>
-                      <a:endParaRPr lang="en-US" sz="2200" dirty="0">
+                      <a:endParaRPr lang="en-US" sz="2600" dirty="0">
                         <a:latin typeface="맑은 고딕" charset="0"/>
                         <a:ea typeface="맑은 고딕" charset="0"/>
                         <a:cs typeface="맑은 고딕" charset="0"/>
@@ -5818,7 +5818,7 @@
                         <a:buNone/>
                       </a:pPr>
                       <a:r>
-                        <a:rPr lang="en-US" sz="2200" dirty="0">
+                        <a:rPr lang="en-US" sz="2600" dirty="0">
                           <a:solidFill>
                             <a:srgbClr val="1F2937"/>
                           </a:solidFill>
@@ -5828,7 +5828,7 @@
                         </a:rPr>
                         <a:t>10 mm</a:t>
                       </a:r>
-                      <a:endParaRPr lang="en-US" sz="2200" dirty="0">
+                      <a:endParaRPr lang="en-US" sz="2600" dirty="0">
                         <a:latin typeface="맑은 고딕" charset="0"/>
                         <a:ea typeface="맑은 고딕" charset="0"/>
                         <a:cs typeface="맑은 고딕" charset="0"/>
@@ -5886,7 +5886,7 @@
                         <a:buNone/>
                       </a:pPr>
                       <a:r>
-                        <a:rPr lang="en-US" sz="2200" dirty="0">
+                        <a:rPr lang="en-US" sz="2600" dirty="0">
                           <a:solidFill>
                             <a:srgbClr val="1F2937"/>
                           </a:solidFill>
@@ -5896,7 +5896,7 @@
                         </a:rPr>
                         <a:t>자의 작은 눈금 10칸</a:t>
                       </a:r>
-                      <a:endParaRPr lang="en-US" sz="2200" dirty="0">
+                      <a:endParaRPr lang="en-US" sz="2600" dirty="0">
                         <a:latin typeface="맑은 고딕" charset="0"/>
                         <a:ea typeface="맑은 고딕" charset="0"/>
                         <a:cs typeface="맑은 고딕" charset="0"/>
@@ -5946,7 +5946,7 @@
                   </a:tcPr>
                 </a:tc>
               </a:tr>
-              <a:tr h="450596">
+              <a:tr h="512572">
                 <a:tc>
                   <a:txBody>
                     <a:bodyPr/>
@@ -5956,7 +5956,7 @@
                         <a:buNone/>
                       </a:pPr>
                       <a:r>
-                        <a:rPr lang="en-US" sz="2200" dirty="0">
+                        <a:rPr lang="en-US" sz="2600" dirty="0">
                           <a:solidFill>
                             <a:srgbClr val="1F2937"/>
                           </a:solidFill>
@@ -5966,7 +5966,7 @@
                         </a:rPr>
                         <a:t>1 m</a:t>
                       </a:r>
-                      <a:endParaRPr lang="en-US" sz="2200" dirty="0">
+                      <a:endParaRPr lang="en-US" sz="2600" dirty="0">
                         <a:latin typeface="맑은 고딕" charset="0"/>
                         <a:ea typeface="맑은 고딕" charset="0"/>
                         <a:cs typeface="맑은 고딕" charset="0"/>
@@ -6024,7 +6024,7 @@
                         <a:buNone/>
                       </a:pPr>
                       <a:r>
-                        <a:rPr lang="en-US" sz="2200" dirty="0">
+                        <a:rPr lang="en-US" sz="2600" dirty="0">
                           <a:solidFill>
                             <a:srgbClr val="1F2937"/>
                           </a:solidFill>
@@ -6034,7 +6034,7 @@
                         </a:rPr>
                         <a:t>100 cm</a:t>
                       </a:r>
-                      <a:endParaRPr lang="en-US" sz="2200" dirty="0">
+                      <a:endParaRPr lang="en-US" sz="2600" dirty="0">
                         <a:latin typeface="맑은 고딕" charset="0"/>
                         <a:ea typeface="맑은 고딕" charset="0"/>
                         <a:cs typeface="맑은 고딕" charset="0"/>
@@ -6092,7 +6092,7 @@
                         <a:buNone/>
                       </a:pPr>
                       <a:r>
-                        <a:rPr lang="en-US" sz="2200" dirty="0">
+                        <a:rPr lang="en-US" sz="2600" dirty="0">
                           <a:solidFill>
                             <a:srgbClr val="1F2937"/>
                           </a:solidFill>
@@ -6102,7 +6102,7 @@
                         </a:rPr>
                         <a:t>양팔을 벌린 길이쯤</a:t>
                       </a:r>
-                      <a:endParaRPr lang="en-US" sz="2200" dirty="0">
+                      <a:endParaRPr lang="en-US" sz="2600" dirty="0">
                         <a:latin typeface="맑은 고딕" charset="0"/>
                         <a:ea typeface="맑은 고딕" charset="0"/>
                         <a:cs typeface="맑은 고딕" charset="0"/>
@@ -6152,7 +6152,7 @@
                   </a:tcPr>
                 </a:tc>
               </a:tr>
-              <a:tr h="450596">
+              <a:tr h="512572">
                 <a:tc>
                   <a:txBody>
                     <a:bodyPr/>
@@ -6162,7 +6162,7 @@
                         <a:buNone/>
                       </a:pPr>
                       <a:r>
-                        <a:rPr lang="en-US" sz="2200" dirty="0">
+                        <a:rPr lang="en-US" sz="2600" dirty="0">
                           <a:solidFill>
                             <a:srgbClr val="1F2937"/>
                           </a:solidFill>
@@ -6172,7 +6172,7 @@
                         </a:rPr>
                         <a:t>1 km</a:t>
                       </a:r>
-                      <a:endParaRPr lang="en-US" sz="2200" dirty="0">
+                      <a:endParaRPr lang="en-US" sz="2600" dirty="0">
                         <a:latin typeface="맑은 고딕" charset="0"/>
                         <a:ea typeface="맑은 고딕" charset="0"/>
                         <a:cs typeface="맑은 고딕" charset="0"/>
@@ -6230,7 +6230,7 @@
                         <a:buNone/>
                       </a:pPr>
                       <a:r>
-                        <a:rPr lang="en-US" sz="2200" dirty="0">
+                        <a:rPr lang="en-US" sz="2600" dirty="0">
                           <a:solidFill>
                             <a:srgbClr val="1F2937"/>
                           </a:solidFill>
@@ -6240,7 +6240,7 @@
                         </a:rPr>
                         <a:t>1000 m</a:t>
                       </a:r>
-                      <a:endParaRPr lang="en-US" sz="2200" dirty="0">
+                      <a:endParaRPr lang="en-US" sz="2600" dirty="0">
                         <a:latin typeface="맑은 고딕" charset="0"/>
                         <a:ea typeface="맑은 고딕" charset="0"/>
                         <a:cs typeface="맑은 고딕" charset="0"/>
@@ -6298,7 +6298,7 @@
                         <a:buNone/>
                       </a:pPr>
                       <a:r>
-                        <a:rPr lang="en-US" sz="2200" dirty="0">
+                        <a:rPr lang="en-US" sz="2600" dirty="0">
                           <a:solidFill>
                             <a:srgbClr val="1F2937"/>
                           </a:solidFill>
@@ -6308,7 +6308,7 @@
                         </a:rPr>
                         <a:t>걸어서 15분쯤</a:t>
                       </a:r>
-                      <a:endParaRPr lang="en-US" sz="2200" dirty="0">
+                      <a:endParaRPr lang="en-US" sz="2600" dirty="0">
                         <a:latin typeface="맑은 고딕" charset="0"/>
                         <a:ea typeface="맑은 고딕" charset="0"/>
                         <a:cs typeface="맑은 고딕" charset="0"/>
@@ -7034,7 +7034,7 @@
                 <a:ea typeface="맑은 고딕" pitchFamily="34" charset="-122"/>
                 <a:cs typeface="맑은 고딕" pitchFamily="34" charset="-120"/>
               </a:rPr>
-              <a:t>한 변이 1 cm인 정사각형의 넓이, ‘1 제곱센티미터’라고 읽어요.</a:t>
+              <a:t>한 변이 1 cm인 정사각형의 넓이, ‘1 제곱센티미터’라고 읽어요.</a:t>
             </a:r>
             <a:endParaRPr lang="ko-KR" sz="2800" dirty="0"/>
           </a:p>
@@ -7137,8 +7137,8 @@
         </p:nvSpPr>
         <p:spPr>
           <a:xfrm>
-            <a:off x="3012948" y="2443353"/>
-            <a:ext cx="457200" cy="457200"/>
+            <a:off x="2990088" y="2420493"/>
+            <a:ext cx="502920" cy="502920"/>
           </a:xfrm>
           <a:custGeom>
             <a:avLst/>
@@ -7147,15 +7147,15 @@
             <a:cxnLst/>
             <a:rect l="l" t="t" r="r" b="b"/>
             <a:pathLst>
-              <a:path w="457200" h="457200">
+              <a:path w="502920" h="502920">
                 <a:moveTo>
-                  <a:pt x="0" y="457200"/>
+                  <a:pt x="0" y="502920"/>
                 </a:moveTo>
                 <a:lnTo>
-                  <a:pt x="457200" y="457200"/>
+                  <a:pt x="502920" y="502920"/>
                 </a:lnTo>
                 <a:lnTo>
-                  <a:pt x="457200" y="0"/>
+                  <a:pt x="502920" y="0"/>
                 </a:lnTo>
                 <a:lnTo>
                   <a:pt x="0" y="0"/>
@@ -7183,7 +7183,7 @@
         </p:nvSpPr>
         <p:spPr>
           <a:xfrm>
-            <a:off x="2859786" y="2474468"/>
+            <a:off x="2859786" y="3000248"/>
             <a:ext cx="763524" cy="349250"/>
           </a:xfrm>
           <a:prstGeom prst="rect">
@@ -7222,7 +7222,7 @@
         </p:nvSpPr>
         <p:spPr>
           <a:xfrm>
-            <a:off x="3061462" y="2497328"/>
+            <a:off x="2178050" y="2497328"/>
             <a:ext cx="763524" cy="349250"/>
           </a:xfrm>
           <a:prstGeom prst="rect">
@@ -7300,8 +7300,8 @@
         </p:nvSpPr>
         <p:spPr>
           <a:xfrm>
-            <a:off x="8033004" y="1986153"/>
-            <a:ext cx="1828800" cy="1371600"/>
+            <a:off x="7941564" y="1917573"/>
+            <a:ext cx="2011680" cy="1508760"/>
           </a:xfrm>
           <a:custGeom>
             <a:avLst/>
@@ -7310,15 +7310,15 @@
             <a:cxnLst/>
             <a:rect l="l" t="t" r="r" b="b"/>
             <a:pathLst>
-              <a:path w="1828800" h="1371600">
+              <a:path w="2011680" h="1508760">
                 <a:moveTo>
-                  <a:pt x="0" y="1371600"/>
+                  <a:pt x="0" y="1508760"/>
                 </a:moveTo>
                 <a:lnTo>
-                  <a:pt x="1828800" y="1371600"/>
+                  <a:pt x="2011680" y="1508760"/>
                 </a:lnTo>
                 <a:lnTo>
-                  <a:pt x="1828800" y="0"/>
+                  <a:pt x="2011680" y="0"/>
                 </a:lnTo>
                 <a:lnTo>
                   <a:pt x="0" y="0"/>
@@ -7341,8 +7341,8 @@
         </p:nvSpPr>
         <p:spPr>
           <a:xfrm flipV="1">
-            <a:off x="7575804" y="1528953"/>
-            <a:ext cx="0" cy="2286000"/>
+            <a:off x="7438644" y="1414653"/>
+            <a:ext cx="0" cy="2514600"/>
           </a:xfrm>
           <a:prstGeom prst="line">
             <a:avLst/>
@@ -7364,8 +7364,8 @@
         </p:nvSpPr>
         <p:spPr>
           <a:xfrm flipV="1">
-            <a:off x="8033004" y="1528953"/>
-            <a:ext cx="0" cy="2286000"/>
+            <a:off x="7941564" y="1414653"/>
+            <a:ext cx="0" cy="2514600"/>
           </a:xfrm>
           <a:prstGeom prst="line">
             <a:avLst/>
@@ -7387,8 +7387,8 @@
         </p:nvSpPr>
         <p:spPr>
           <a:xfrm flipV="1">
-            <a:off x="8490204" y="1528953"/>
-            <a:ext cx="0" cy="2286000"/>
+            <a:off x="8444484" y="1414653"/>
+            <a:ext cx="0" cy="2514600"/>
           </a:xfrm>
           <a:prstGeom prst="line">
             <a:avLst/>
@@ -7410,8 +7410,8 @@
         </p:nvSpPr>
         <p:spPr>
           <a:xfrm flipV="1">
-            <a:off x="8947404" y="1528953"/>
-            <a:ext cx="0" cy="2286000"/>
+            <a:off x="8947404" y="1414653"/>
+            <a:ext cx="0" cy="2514600"/>
           </a:xfrm>
           <a:prstGeom prst="line">
             <a:avLst/>
@@ -7433,8 +7433,8 @@
         </p:nvSpPr>
         <p:spPr>
           <a:xfrm flipV="1">
-            <a:off x="9404604" y="1528953"/>
-            <a:ext cx="0" cy="2286000"/>
+            <a:off x="9450324" y="1414653"/>
+            <a:ext cx="0" cy="2514600"/>
           </a:xfrm>
           <a:prstGeom prst="line">
             <a:avLst/>
@@ -7456,8 +7456,8 @@
         </p:nvSpPr>
         <p:spPr>
           <a:xfrm flipV="1">
-            <a:off x="9861804" y="1528953"/>
-            <a:ext cx="0" cy="2286000"/>
+            <a:off x="9953244" y="1414653"/>
+            <a:ext cx="0" cy="2514600"/>
           </a:xfrm>
           <a:prstGeom prst="line">
             <a:avLst/>
@@ -7479,8 +7479,8 @@
         </p:nvSpPr>
         <p:spPr>
           <a:xfrm flipV="1">
-            <a:off x="10319004" y="1528953"/>
-            <a:ext cx="0" cy="2286000"/>
+            <a:off x="10456164" y="1414653"/>
+            <a:ext cx="0" cy="2514600"/>
           </a:xfrm>
           <a:prstGeom prst="line">
             <a:avLst/>
@@ -7502,8 +7502,8 @@
         </p:nvSpPr>
         <p:spPr>
           <a:xfrm>
-            <a:off x="7575804" y="3814953"/>
-            <a:ext cx="2743200" cy="0"/>
+            <a:off x="7438644" y="3929253"/>
+            <a:ext cx="3017520" cy="0"/>
           </a:xfrm>
           <a:prstGeom prst="line">
             <a:avLst/>
@@ -7525,8 +7525,8 @@
         </p:nvSpPr>
         <p:spPr>
           <a:xfrm>
-            <a:off x="7575804" y="3357753"/>
-            <a:ext cx="2743200" cy="0"/>
+            <a:off x="7438644" y="3426333"/>
+            <a:ext cx="3017520" cy="0"/>
           </a:xfrm>
           <a:prstGeom prst="line">
             <a:avLst/>
@@ -7548,8 +7548,8 @@
         </p:nvSpPr>
         <p:spPr>
           <a:xfrm>
-            <a:off x="7575804" y="2900553"/>
-            <a:ext cx="2743200" cy="0"/>
+            <a:off x="7438644" y="2923413"/>
+            <a:ext cx="3017520" cy="0"/>
           </a:xfrm>
           <a:prstGeom prst="line">
             <a:avLst/>
@@ -7571,8 +7571,8 @@
         </p:nvSpPr>
         <p:spPr>
           <a:xfrm>
-            <a:off x="7575804" y="2443353"/>
-            <a:ext cx="2743200" cy="0"/>
+            <a:off x="7438644" y="2420493"/>
+            <a:ext cx="3017520" cy="0"/>
           </a:xfrm>
           <a:prstGeom prst="line">
             <a:avLst/>
@@ -7594,8 +7594,8 @@
         </p:nvSpPr>
         <p:spPr>
           <a:xfrm>
-            <a:off x="7575804" y="1986153"/>
-            <a:ext cx="2743200" cy="0"/>
+            <a:off x="7438644" y="1917573"/>
+            <a:ext cx="3017520" cy="0"/>
           </a:xfrm>
           <a:prstGeom prst="line">
             <a:avLst/>
@@ -7617,8 +7617,8 @@
         </p:nvSpPr>
         <p:spPr>
           <a:xfrm>
-            <a:off x="7575804" y="1528953"/>
-            <a:ext cx="2743200" cy="0"/>
+            <a:off x="7438644" y="1414653"/>
+            <a:ext cx="3017520" cy="0"/>
           </a:xfrm>
           <a:prstGeom prst="line">
             <a:avLst/>
@@ -7640,8 +7640,8 @@
         </p:nvSpPr>
         <p:spPr>
           <a:xfrm>
-            <a:off x="8033004" y="1986153"/>
-            <a:ext cx="1828800" cy="1371600"/>
+            <a:off x="7941564" y="1917573"/>
+            <a:ext cx="2011680" cy="1508760"/>
           </a:xfrm>
           <a:custGeom>
             <a:avLst/>
@@ -7650,15 +7650,15 @@
             <a:cxnLst/>
             <a:rect l="l" t="t" r="r" b="b"/>
             <a:pathLst>
-              <a:path w="1828800" h="1371600">
+              <a:path w="2011680" h="1508760">
                 <a:moveTo>
-                  <a:pt x="0" y="1371600"/>
+                  <a:pt x="0" y="1508760"/>
                 </a:moveTo>
                 <a:lnTo>
-                  <a:pt x="1828800" y="1371600"/>
+                  <a:pt x="2011680" y="1508760"/>
                 </a:lnTo>
                 <a:lnTo>
-                  <a:pt x="1828800" y="0"/>
+                  <a:pt x="2011680" y="0"/>
                 </a:lnTo>
                 <a:lnTo>
                   <a:pt x="0" y="0"/>
@@ -7906,8 +7906,8 @@
         </p:nvSpPr>
         <p:spPr>
           <a:xfrm>
-            <a:off x="7909011" y="2400300"/>
-            <a:ext cx="2743200" cy="1645920"/>
+            <a:off x="7952743" y="2426539"/>
+            <a:ext cx="2655737" cy="1593442"/>
           </a:xfrm>
           <a:custGeom>
             <a:avLst/>
@@ -7916,15 +7916,15 @@
             <a:cxnLst/>
             <a:rect l="l" t="t" r="r" b="b"/>
             <a:pathLst>
-              <a:path w="2743200" h="1645920">
+              <a:path w="2655737" h="1593442">
                 <a:moveTo>
-                  <a:pt x="0" y="1645920"/>
+                  <a:pt x="0" y="1593442"/>
                 </a:moveTo>
                 <a:lnTo>
-                  <a:pt x="2743200" y="1645920"/>
+                  <a:pt x="2655737" y="1593442"/>
                 </a:lnTo>
                 <a:lnTo>
-                  <a:pt x="2743200" y="0"/>
+                  <a:pt x="2655737" y="0"/>
                 </a:lnTo>
                 <a:lnTo>
                   <a:pt x="0" y="0"/>
@@ -7947,8 +7947,8 @@
         </p:nvSpPr>
         <p:spPr>
           <a:xfrm flipV="1">
-            <a:off x="7360371" y="1851660"/>
-            <a:ext cx="0" cy="2743200"/>
+            <a:off x="7421596" y="1895392"/>
+            <a:ext cx="0" cy="2655737"/>
           </a:xfrm>
           <a:prstGeom prst="line">
             <a:avLst/>
@@ -7970,8 +7970,8 @@
         </p:nvSpPr>
         <p:spPr>
           <a:xfrm flipV="1">
-            <a:off x="7909011" y="1851660"/>
-            <a:ext cx="0" cy="2743200"/>
+            <a:off x="7952743" y="1895392"/>
+            <a:ext cx="0" cy="2655737"/>
           </a:xfrm>
           <a:prstGeom prst="line">
             <a:avLst/>
@@ -7993,8 +7993,8 @@
         </p:nvSpPr>
         <p:spPr>
           <a:xfrm flipV="1">
-            <a:off x="8457651" y="1851660"/>
-            <a:ext cx="0" cy="2743200"/>
+            <a:off x="8483890" y="1895392"/>
+            <a:ext cx="0" cy="2655737"/>
           </a:xfrm>
           <a:prstGeom prst="line">
             <a:avLst/>
@@ -8016,8 +8016,8 @@
         </p:nvSpPr>
         <p:spPr>
           <a:xfrm flipV="1">
-            <a:off x="9006291" y="1851660"/>
-            <a:ext cx="0" cy="2743200"/>
+            <a:off x="9015038" y="1895392"/>
+            <a:ext cx="0" cy="2655737"/>
           </a:xfrm>
           <a:prstGeom prst="line">
             <a:avLst/>
@@ -8039,8 +8039,8 @@
         </p:nvSpPr>
         <p:spPr>
           <a:xfrm flipV="1">
-            <a:off x="9554931" y="1851660"/>
-            <a:ext cx="0" cy="2743200"/>
+            <a:off x="9546185" y="1895392"/>
+            <a:ext cx="0" cy="2655737"/>
           </a:xfrm>
           <a:prstGeom prst="line">
             <a:avLst/>
@@ -8062,8 +8062,8 @@
         </p:nvSpPr>
         <p:spPr>
           <a:xfrm flipV="1">
-            <a:off x="10103571" y="1851660"/>
-            <a:ext cx="0" cy="2743200"/>
+            <a:off x="10077332" y="1895392"/>
+            <a:ext cx="0" cy="2655737"/>
           </a:xfrm>
           <a:prstGeom prst="line">
             <a:avLst/>
@@ -8085,8 +8085,8 @@
         </p:nvSpPr>
         <p:spPr>
           <a:xfrm flipV="1">
-            <a:off x="10652211" y="1851660"/>
-            <a:ext cx="0" cy="2743200"/>
+            <a:off x="10608480" y="1895392"/>
+            <a:ext cx="0" cy="2655737"/>
           </a:xfrm>
           <a:prstGeom prst="line">
             <a:avLst/>
@@ -8108,8 +8108,8 @@
         </p:nvSpPr>
         <p:spPr>
           <a:xfrm flipV="1">
-            <a:off x="11200851" y="1851660"/>
-            <a:ext cx="0" cy="2743200"/>
+            <a:off x="11139627" y="1895392"/>
+            <a:ext cx="0" cy="2655737"/>
           </a:xfrm>
           <a:prstGeom prst="line">
             <a:avLst/>
@@ -8131,8 +8131,8 @@
         </p:nvSpPr>
         <p:spPr>
           <a:xfrm>
-            <a:off x="7360371" y="4594860"/>
-            <a:ext cx="3840480" cy="0"/>
+            <a:off x="7421596" y="4551128"/>
+            <a:ext cx="3718032" cy="0"/>
           </a:xfrm>
           <a:prstGeom prst="line">
             <a:avLst/>
@@ -8154,8 +8154,8 @@
         </p:nvSpPr>
         <p:spPr>
           <a:xfrm>
-            <a:off x="7360371" y="4046220"/>
-            <a:ext cx="3840480" cy="0"/>
+            <a:off x="7421596" y="4019981"/>
+            <a:ext cx="3718032" cy="0"/>
           </a:xfrm>
           <a:prstGeom prst="line">
             <a:avLst/>
@@ -8177,8 +8177,8 @@
         </p:nvSpPr>
         <p:spPr>
           <a:xfrm>
-            <a:off x="7360371" y="3497580"/>
-            <a:ext cx="3840480" cy="0"/>
+            <a:off x="7421596" y="3488834"/>
+            <a:ext cx="3718032" cy="0"/>
           </a:xfrm>
           <a:prstGeom prst="line">
             <a:avLst/>
@@ -8200,8 +8200,8 @@
         </p:nvSpPr>
         <p:spPr>
           <a:xfrm>
-            <a:off x="7360371" y="2948940"/>
-            <a:ext cx="3840480" cy="0"/>
+            <a:off x="7421596" y="2957686"/>
+            <a:ext cx="3718032" cy="0"/>
           </a:xfrm>
           <a:prstGeom prst="line">
             <a:avLst/>
@@ -8223,8 +8223,8 @@
         </p:nvSpPr>
         <p:spPr>
           <a:xfrm>
-            <a:off x="7360371" y="2400300"/>
-            <a:ext cx="3840480" cy="0"/>
+            <a:off x="7421596" y="2426539"/>
+            <a:ext cx="3718032" cy="0"/>
           </a:xfrm>
           <a:prstGeom prst="line">
             <a:avLst/>
@@ -8246,8 +8246,8 @@
         </p:nvSpPr>
         <p:spPr>
           <a:xfrm>
-            <a:off x="7360371" y="1851660"/>
-            <a:ext cx="3840480" cy="0"/>
+            <a:off x="7421596" y="1895392"/>
+            <a:ext cx="3718032" cy="0"/>
           </a:xfrm>
           <a:prstGeom prst="line">
             <a:avLst/>
@@ -8269,8 +8269,8 @@
         </p:nvSpPr>
         <p:spPr>
           <a:xfrm>
-            <a:off x="7909011" y="2400300"/>
-            <a:ext cx="2743200" cy="1645920"/>
+            <a:off x="7952743" y="2426539"/>
+            <a:ext cx="2655737" cy="1593442"/>
           </a:xfrm>
           <a:custGeom>
             <a:avLst/>
@@ -8279,15 +8279,15 @@
             <a:cxnLst/>
             <a:rect l="l" t="t" r="r" b="b"/>
             <a:pathLst>
-              <a:path w="2743200" h="1645920">
+              <a:path w="2655737" h="1593442">
                 <a:moveTo>
-                  <a:pt x="0" y="1645920"/>
+                  <a:pt x="0" y="1593442"/>
                 </a:moveTo>
                 <a:lnTo>
-                  <a:pt x="2743200" y="1645920"/>
+                  <a:pt x="2655737" y="1593442"/>
                 </a:lnTo>
                 <a:lnTo>
-                  <a:pt x="2743200" y="0"/>
+                  <a:pt x="2655737" y="0"/>
                 </a:lnTo>
                 <a:lnTo>
                   <a:pt x="0" y="0"/>
@@ -8313,7 +8313,7 @@
         </p:nvSpPr>
         <p:spPr>
           <a:xfrm>
-            <a:off x="8898849" y="4123055"/>
+            <a:off x="8898849" y="4096816"/>
             <a:ext cx="763524" cy="349250"/>
           </a:xfrm>
           <a:prstGeom prst="rect">
@@ -8352,7 +8352,7 @@
         </p:nvSpPr>
         <p:spPr>
           <a:xfrm>
-            <a:off x="7096973" y="3048635"/>
+            <a:off x="7140705" y="3048635"/>
             <a:ext cx="763524" cy="349250"/>
           </a:xfrm>
           <a:prstGeom prst="rect">
@@ -10083,8 +10083,8 @@
         </p:nvSpPr>
         <p:spPr>
           <a:xfrm>
-            <a:off x="1984248" y="3089529"/>
-            <a:ext cx="2514600" cy="502920"/>
+            <a:off x="2258568" y="3144393"/>
+            <a:ext cx="1965960" cy="393192"/>
           </a:xfrm>
           <a:custGeom>
             <a:avLst/>
@@ -10093,15 +10093,15 @@
             <a:cxnLst/>
             <a:rect l="l" t="t" r="r" b="b"/>
             <a:pathLst>
-              <a:path w="2514600" h="502920">
+              <a:path w="1965960" h="393192">
                 <a:moveTo>
-                  <a:pt x="0" y="502920"/>
+                  <a:pt x="0" y="393192"/>
                 </a:moveTo>
                 <a:lnTo>
-                  <a:pt x="2514600" y="502920"/>
+                  <a:pt x="1965960" y="393192"/>
                 </a:lnTo>
                 <a:lnTo>
-                  <a:pt x="2514600" y="0"/>
+                  <a:pt x="1965960" y="0"/>
                 </a:lnTo>
                 <a:lnTo>
                   <a:pt x="0" y="0"/>
@@ -10124,8 +10124,8 @@
         </p:nvSpPr>
         <p:spPr>
           <a:xfrm flipV="1">
-            <a:off x="1481328" y="2586609"/>
-            <a:ext cx="0" cy="1508760"/>
+            <a:off x="1865376" y="2751201"/>
+            <a:ext cx="0" cy="1179576"/>
           </a:xfrm>
           <a:prstGeom prst="line">
             <a:avLst/>
@@ -10147,8 +10147,8 @@
         </p:nvSpPr>
         <p:spPr>
           <a:xfrm flipV="1">
-            <a:off x="1984248" y="2586609"/>
-            <a:ext cx="0" cy="1508760"/>
+            <a:off x="2258568" y="2751201"/>
+            <a:ext cx="0" cy="1179576"/>
           </a:xfrm>
           <a:prstGeom prst="line">
             <a:avLst/>
@@ -10170,8 +10170,8 @@
         </p:nvSpPr>
         <p:spPr>
           <a:xfrm flipV="1">
-            <a:off x="2487168" y="2586609"/>
-            <a:ext cx="0" cy="1508760"/>
+            <a:off x="2651760" y="2751201"/>
+            <a:ext cx="0" cy="1179576"/>
           </a:xfrm>
           <a:prstGeom prst="line">
             <a:avLst/>
@@ -10193,8 +10193,8 @@
         </p:nvSpPr>
         <p:spPr>
           <a:xfrm flipV="1">
-            <a:off x="2990088" y="2586609"/>
-            <a:ext cx="0" cy="1508760"/>
+            <a:off x="3044952" y="2751201"/>
+            <a:ext cx="0" cy="1179576"/>
           </a:xfrm>
           <a:prstGeom prst="line">
             <a:avLst/>
@@ -10216,8 +10216,8 @@
         </p:nvSpPr>
         <p:spPr>
           <a:xfrm flipV="1">
-            <a:off x="3493008" y="2586609"/>
-            <a:ext cx="0" cy="1508760"/>
+            <a:off x="3438144" y="2751201"/>
+            <a:ext cx="0" cy="1179576"/>
           </a:xfrm>
           <a:prstGeom prst="line">
             <a:avLst/>
@@ -10239,8 +10239,8 @@
         </p:nvSpPr>
         <p:spPr>
           <a:xfrm flipV="1">
-            <a:off x="3995928" y="2586609"/>
-            <a:ext cx="0" cy="1508760"/>
+            <a:off x="3831336" y="2751201"/>
+            <a:ext cx="0" cy="1179576"/>
           </a:xfrm>
           <a:prstGeom prst="line">
             <a:avLst/>
@@ -10262,8 +10262,8 @@
         </p:nvSpPr>
         <p:spPr>
           <a:xfrm flipV="1">
-            <a:off x="4498848" y="2586609"/>
-            <a:ext cx="0" cy="1508760"/>
+            <a:off x="4224528" y="2751201"/>
+            <a:ext cx="0" cy="1179576"/>
           </a:xfrm>
           <a:prstGeom prst="line">
             <a:avLst/>
@@ -10285,8 +10285,8 @@
         </p:nvSpPr>
         <p:spPr>
           <a:xfrm flipV="1">
-            <a:off x="5001768" y="2586609"/>
-            <a:ext cx="0" cy="1508760"/>
+            <a:off x="4617720" y="2751201"/>
+            <a:ext cx="0" cy="1179576"/>
           </a:xfrm>
           <a:prstGeom prst="line">
             <a:avLst/>
@@ -10308,8 +10308,8 @@
         </p:nvSpPr>
         <p:spPr>
           <a:xfrm>
-            <a:off x="1481328" y="4095369"/>
-            <a:ext cx="3520440" cy="0"/>
+            <a:off x="1865376" y="3930777"/>
+            <a:ext cx="2752344" cy="0"/>
           </a:xfrm>
           <a:prstGeom prst="line">
             <a:avLst/>
@@ -10331,8 +10331,8 @@
         </p:nvSpPr>
         <p:spPr>
           <a:xfrm>
-            <a:off x="1481328" y="3592449"/>
-            <a:ext cx="3520440" cy="0"/>
+            <a:off x="1865376" y="3537585"/>
+            <a:ext cx="2752344" cy="0"/>
           </a:xfrm>
           <a:prstGeom prst="line">
             <a:avLst/>
@@ -10354,8 +10354,8 @@
         </p:nvSpPr>
         <p:spPr>
           <a:xfrm>
-            <a:off x="1481328" y="3089529"/>
-            <a:ext cx="3520440" cy="0"/>
+            <a:off x="1865376" y="3144393"/>
+            <a:ext cx="2752344" cy="0"/>
           </a:xfrm>
           <a:prstGeom prst="line">
             <a:avLst/>
@@ -10377,8 +10377,8 @@
         </p:nvSpPr>
         <p:spPr>
           <a:xfrm>
-            <a:off x="1481328" y="2586609"/>
-            <a:ext cx="3520440" cy="0"/>
+            <a:off x="1865376" y="2751201"/>
+            <a:ext cx="2752344" cy="0"/>
           </a:xfrm>
           <a:prstGeom prst="line">
             <a:avLst/>
@@ -10400,8 +10400,8 @@
         </p:nvSpPr>
         <p:spPr>
           <a:xfrm>
-            <a:off x="1984248" y="3089529"/>
-            <a:ext cx="2514600" cy="502920"/>
+            <a:off x="2258568" y="3144393"/>
+            <a:ext cx="1965960" cy="393192"/>
           </a:xfrm>
           <a:custGeom>
             <a:avLst/>
@@ -10410,15 +10410,15 @@
             <a:cxnLst/>
             <a:rect l="l" t="t" r="r" b="b"/>
             <a:pathLst>
-              <a:path w="2514600" h="502920">
+              <a:path w="1965960" h="393192">
                 <a:moveTo>
-                  <a:pt x="0" y="502920"/>
+                  <a:pt x="0" y="393192"/>
                 </a:moveTo>
                 <a:lnTo>
-                  <a:pt x="2514600" y="502920"/>
+                  <a:pt x="1965960" y="393192"/>
                 </a:lnTo>
                 <a:lnTo>
-                  <a:pt x="2514600" y="0"/>
+                  <a:pt x="1965960" y="0"/>
                 </a:lnTo>
                 <a:lnTo>
                   <a:pt x="0" y="0"/>
@@ -10444,7 +10444,7 @@
         </p:nvSpPr>
         <p:spPr>
           <a:xfrm>
-            <a:off x="2859786" y="3166364"/>
+            <a:off x="2859786" y="3614420"/>
             <a:ext cx="763524" cy="349250"/>
           </a:xfrm>
           <a:prstGeom prst="rect">
@@ -10483,7 +10483,7 @@
         </p:nvSpPr>
         <p:spPr>
           <a:xfrm>
-            <a:off x="4547362" y="3166364"/>
+            <a:off x="4273042" y="3166364"/>
             <a:ext cx="763524" cy="349250"/>
           </a:xfrm>
           <a:prstGeom prst="rect">
@@ -10561,8 +10561,8 @@
         </p:nvSpPr>
         <p:spPr>
           <a:xfrm>
-            <a:off x="8350987" y="2744572"/>
-            <a:ext cx="1192835" cy="1192835"/>
+            <a:off x="8450229" y="2843814"/>
+            <a:ext cx="994349" cy="994349"/>
           </a:xfrm>
           <a:custGeom>
             <a:avLst/>
@@ -10571,15 +10571,15 @@
             <a:cxnLst/>
             <a:rect l="l" t="t" r="r" b="b"/>
             <a:pathLst>
-              <a:path w="1192835" h="1192835">
+              <a:path w="994349" h="994349">
                 <a:moveTo>
-                  <a:pt x="0" y="1192835"/>
+                  <a:pt x="0" y="994349"/>
                 </a:moveTo>
                 <a:lnTo>
-                  <a:pt x="1192835" y="1192835"/>
+                  <a:pt x="994349" y="994349"/>
                 </a:lnTo>
                 <a:lnTo>
-                  <a:pt x="1192835" y="0"/>
+                  <a:pt x="994349" y="0"/>
                 </a:lnTo>
                 <a:lnTo>
                   <a:pt x="0" y="0"/>
@@ -10602,8 +10602,8 @@
         </p:nvSpPr>
         <p:spPr>
           <a:xfrm flipV="1">
-            <a:off x="7953375" y="2346960"/>
-            <a:ext cx="0" cy="1988058"/>
+            <a:off x="8118780" y="2512365"/>
+            <a:ext cx="0" cy="1657248"/>
           </a:xfrm>
           <a:prstGeom prst="line">
             <a:avLst/>
@@ -10625,8 +10625,8 @@
         </p:nvSpPr>
         <p:spPr>
           <a:xfrm flipV="1">
-            <a:off x="8350987" y="2346960"/>
-            <a:ext cx="0" cy="1988058"/>
+            <a:off x="8450229" y="2512365"/>
+            <a:ext cx="0" cy="1657248"/>
           </a:xfrm>
           <a:prstGeom prst="line">
             <a:avLst/>
@@ -10648,8 +10648,8 @@
         </p:nvSpPr>
         <p:spPr>
           <a:xfrm flipV="1">
-            <a:off x="8748598" y="2346960"/>
-            <a:ext cx="0" cy="1988058"/>
+            <a:off x="8781679" y="2512365"/>
+            <a:ext cx="0" cy="1657248"/>
           </a:xfrm>
           <a:prstGeom prst="line">
             <a:avLst/>
@@ -10671,8 +10671,8 @@
         </p:nvSpPr>
         <p:spPr>
           <a:xfrm flipV="1">
-            <a:off x="9146210" y="2346960"/>
-            <a:ext cx="0" cy="1988058"/>
+            <a:off x="9113129" y="2512365"/>
+            <a:ext cx="0" cy="1657248"/>
           </a:xfrm>
           <a:prstGeom prst="line">
             <a:avLst/>
@@ -10694,8 +10694,8 @@
         </p:nvSpPr>
         <p:spPr>
           <a:xfrm flipV="1">
-            <a:off x="9543821" y="2346960"/>
-            <a:ext cx="0" cy="1988058"/>
+            <a:off x="9444579" y="2512365"/>
+            <a:ext cx="0" cy="1657248"/>
           </a:xfrm>
           <a:prstGeom prst="line">
             <a:avLst/>
@@ -10717,8 +10717,8 @@
         </p:nvSpPr>
         <p:spPr>
           <a:xfrm flipV="1">
-            <a:off x="9941433" y="2346960"/>
-            <a:ext cx="0" cy="1988058"/>
+            <a:off x="9776028" y="2512365"/>
+            <a:ext cx="0" cy="1657248"/>
           </a:xfrm>
           <a:prstGeom prst="line">
             <a:avLst/>
@@ -10740,8 +10740,8 @@
         </p:nvSpPr>
         <p:spPr>
           <a:xfrm>
-            <a:off x="7953375" y="4335018"/>
-            <a:ext cx="1988058" cy="0"/>
+            <a:off x="8118780" y="4169613"/>
+            <a:ext cx="1657248" cy="0"/>
           </a:xfrm>
           <a:prstGeom prst="line">
             <a:avLst/>
@@ -10763,8 +10763,8 @@
         </p:nvSpPr>
         <p:spPr>
           <a:xfrm>
-            <a:off x="7953375" y="3937406"/>
-            <a:ext cx="1988058" cy="0"/>
+            <a:off x="8118780" y="3838164"/>
+            <a:ext cx="1657248" cy="0"/>
           </a:xfrm>
           <a:prstGeom prst="line">
             <a:avLst/>
@@ -10786,8 +10786,8 @@
         </p:nvSpPr>
         <p:spPr>
           <a:xfrm>
-            <a:off x="7953375" y="3539795"/>
-            <a:ext cx="1988058" cy="0"/>
+            <a:off x="8118780" y="3506714"/>
+            <a:ext cx="1657248" cy="0"/>
           </a:xfrm>
           <a:prstGeom prst="line">
             <a:avLst/>
@@ -10809,8 +10809,8 @@
         </p:nvSpPr>
         <p:spPr>
           <a:xfrm>
-            <a:off x="7953375" y="3142183"/>
-            <a:ext cx="1988058" cy="0"/>
+            <a:off x="8118780" y="3175264"/>
+            <a:ext cx="1657248" cy="0"/>
           </a:xfrm>
           <a:prstGeom prst="line">
             <a:avLst/>
@@ -10832,8 +10832,8 @@
         </p:nvSpPr>
         <p:spPr>
           <a:xfrm>
-            <a:off x="7953375" y="2744572"/>
-            <a:ext cx="1988058" cy="0"/>
+            <a:off x="8118780" y="2843814"/>
+            <a:ext cx="1657248" cy="0"/>
           </a:xfrm>
           <a:prstGeom prst="line">
             <a:avLst/>
@@ -10855,8 +10855,8 @@
         </p:nvSpPr>
         <p:spPr>
           <a:xfrm>
-            <a:off x="7953375" y="2346960"/>
-            <a:ext cx="1988058" cy="0"/>
+            <a:off x="8118780" y="2512365"/>
+            <a:ext cx="1657248" cy="0"/>
           </a:xfrm>
           <a:prstGeom prst="line">
             <a:avLst/>
@@ -10878,8 +10878,8 @@
         </p:nvSpPr>
         <p:spPr>
           <a:xfrm>
-            <a:off x="8350987" y="2744572"/>
-            <a:ext cx="1192835" cy="1192835"/>
+            <a:off x="8450229" y="2843814"/>
+            <a:ext cx="994349" cy="994349"/>
           </a:xfrm>
           <a:custGeom>
             <a:avLst/>
@@ -10888,15 +10888,15 @@
             <a:cxnLst/>
             <a:rect l="l" t="t" r="r" b="b"/>
             <a:pathLst>
-              <a:path w="1192835" h="1192835">
+              <a:path w="994349" h="994349">
                 <a:moveTo>
-                  <a:pt x="0" y="1192835"/>
+                  <a:pt x="0" y="994349"/>
                 </a:moveTo>
                 <a:lnTo>
-                  <a:pt x="1192835" y="1192835"/>
+                  <a:pt x="994349" y="994349"/>
                 </a:lnTo>
                 <a:lnTo>
-                  <a:pt x="1192835" y="0"/>
+                  <a:pt x="994349" y="0"/>
                 </a:lnTo>
                 <a:lnTo>
                   <a:pt x="0" y="0"/>
@@ -10922,7 +10922,7 @@
         </p:nvSpPr>
         <p:spPr>
           <a:xfrm>
-            <a:off x="8565642" y="4014241"/>
+            <a:off x="8565642" y="3914999"/>
             <a:ext cx="763524" cy="349250"/>
           </a:xfrm>
           <a:prstGeom prst="rect">
@@ -10961,7 +10961,7 @@
         </p:nvSpPr>
         <p:spPr>
           <a:xfrm>
-            <a:off x="9592335" y="3166364"/>
+            <a:off x="9493093" y="3166364"/>
             <a:ext cx="763524" cy="349250"/>
           </a:xfrm>
           <a:prstGeom prst="rect">
